--- a/curso/pptx/S39.pptx
+++ b/curso/pptx/S39.pptx
@@ -3890,8 +3890,8 @@
         </p:nvSpPr>
         <p:spPr>
           <a:xfrm>
-            <a:off x="640000" y="420000"/>
-            <a:ext cx="10912000" cy="420000"/>
+            <a:off x="10652000" y="380000"/>
+            <a:ext cx="900000" cy="800000"/>
           </a:xfrm>
           <a:prstGeom prst="rect">
             <a:avLst/>
@@ -3906,17 +3906,17 @@
           <a:p>
             <a:pPr>
               <a:spcAft>
-                <a:spcPts val="810"/>
+                <a:spcPts val="1980"/>
               </a:spcAft>
             </a:pPr>
             <a:r>
-              <a:rPr sz="1800" b="1">
+              <a:rPr sz="4400" b="0">
                 <a:solidFill>
                   <a:srgbClr val="1F2A44"/>
                 </a:solidFill>
                 <a:latin typeface="Nunito Sans"/>
               </a:rPr>
-              <a:t>🦉 Aula de Filosofía</a:t>
+              <a:t>🙃</a:t>
             </a:r>
           </a:p>
         </p:txBody>

--- a/curso/pptx/S39.pptx
+++ b/curso/pptx/S39.pptx
@@ -471,426 +471,6 @@
     </a:lvl9pPr>
   </p:notesStyle>
 </p:notesMaster>
-</file>
-
-<file path=ppt/notesSlides/notesSlide1.xml><?xml version="1.0" encoding="utf-8"?>
-<p:notes xmlns:a="http://schemas.openxmlformats.org/drawingml/2006/main" xmlns:p="http://schemas.openxmlformats.org/presentationml/2006/main" xmlns:r="http://schemas.openxmlformats.org/officeDocument/2006/relationships">
-  <p:cSld>
-    <p:spTree>
-      <p:nvGrpSpPr>
-        <p:cNvPr id="1" name=""/>
-        <p:cNvGrpSpPr/>
-        <p:nvPr/>
-      </p:nvGrpSpPr>
-      <p:grpSpPr>
-        <a:xfrm>
-          <a:off x="0" y="0"/>
-          <a:ext cx="0" cy="0"/>
-          <a:chOff x="0" y="0"/>
-          <a:chExt cx="0" cy="0"/>
-        </a:xfrm>
-      </p:grpSpPr>
-      <p:sp>
-        <p:nvSpPr>
-          <p:cNvPr id="2" name="Slide Image Placeholder 1"/>
-          <p:cNvSpPr>
-            <a:spLocks noGrp="1"/>
-          </p:cNvSpPr>
-          <p:nvPr>
-            <p:ph type="sldImg" idx="2"/>
-          </p:nvPr>
-        </p:nvSpPr>
-        <p:spPr/>
-      </p:sp>
-      <p:sp>
-        <p:nvSpPr>
-          <p:cNvPr id="3" name="Notes Placeholder 2"/>
-          <p:cNvSpPr>
-            <a:spLocks noGrp="1"/>
-          </p:cNvSpPr>
-          <p:nvPr>
-            <p:ph type="body" idx="3" sz="quarter"/>
-          </p:nvPr>
-        </p:nvSpPr>
-        <p:spPr/>
-        <p:txBody>
-          <a:bodyPr/>
-          <a:lstStyle/>
-          <a:p>
-            <a:r>
-              <a:t>3 minutos. Sin apuntes. Es para recordar, no cuenta para nota.</a:t>
-            </a:r>
-          </a:p>
-        </p:txBody>
-      </p:sp>
-      <p:sp>
-        <p:nvSpPr>
-          <p:cNvPr id="4" name="Slide Number Placeholder 3"/>
-          <p:cNvSpPr>
-            <a:spLocks noGrp="1"/>
-          </p:cNvSpPr>
-          <p:nvPr>
-            <p:ph type="sldNum" idx="5" sz="quarter"/>
-          </p:nvPr>
-        </p:nvSpPr>
-        <p:spPr/>
-      </p:sp>
-    </p:spTree>
-  </p:cSld>
-  <p:clrMapOvr>
-    <a:masterClrMapping/>
-  </p:clrMapOvr>
-</p:notes>
-</file>
-
-<file path=ppt/notesSlides/notesSlide2.xml><?xml version="1.0" encoding="utf-8"?>
-<p:notes xmlns:a="http://schemas.openxmlformats.org/drawingml/2006/main" xmlns:p="http://schemas.openxmlformats.org/presentationml/2006/main" xmlns:r="http://schemas.openxmlformats.org/officeDocument/2006/relationships">
-  <p:cSld>
-    <p:spTree>
-      <p:nvGrpSpPr>
-        <p:cNvPr id="1" name=""/>
-        <p:cNvGrpSpPr/>
-        <p:nvPr/>
-      </p:nvGrpSpPr>
-      <p:grpSpPr>
-        <a:xfrm>
-          <a:off x="0" y="0"/>
-          <a:ext cx="0" cy="0"/>
-          <a:chOff x="0" y="0"/>
-          <a:chExt cx="0" cy="0"/>
-        </a:xfrm>
-      </p:grpSpPr>
-      <p:sp>
-        <p:nvSpPr>
-          <p:cNvPr id="2" name="Slide Image Placeholder 1"/>
-          <p:cNvSpPr>
-            <a:spLocks noGrp="1"/>
-          </p:cNvSpPr>
-          <p:nvPr>
-            <p:ph type="sldImg" idx="2"/>
-          </p:nvPr>
-        </p:nvSpPr>
-        <p:spPr/>
-      </p:sp>
-      <p:sp>
-        <p:nvSpPr>
-          <p:cNvPr id="3" name="Notes Placeholder 2"/>
-          <p:cNvSpPr>
-            <a:spLocks noGrp="1"/>
-          </p:cNvSpPr>
-          <p:nvPr>
-            <p:ph type="body" idx="3" sz="quarter"/>
-          </p:nvPr>
-        </p:nvSpPr>
-        <p:spPr/>
-        <p:txBody>
-          <a:bodyPr/>
-          <a:lstStyle/>
-          <a:p>
-            <a:r>
-              <a:t>3 minutos. Sin apuntes. Es para recordar, no cuenta para nota.</a:t>
-            </a:r>
-          </a:p>
-        </p:txBody>
-      </p:sp>
-      <p:sp>
-        <p:nvSpPr>
-          <p:cNvPr id="4" name="Slide Number Placeholder 3"/>
-          <p:cNvSpPr>
-            <a:spLocks noGrp="1"/>
-          </p:cNvSpPr>
-          <p:nvPr>
-            <p:ph type="sldNum" idx="5" sz="quarter"/>
-          </p:nvPr>
-        </p:nvSpPr>
-        <p:spPr/>
-      </p:sp>
-    </p:spTree>
-  </p:cSld>
-  <p:clrMapOvr>
-    <a:masterClrMapping/>
-  </p:clrMapOvr>
-</p:notes>
-</file>
-
-<file path=ppt/notesSlides/notesSlide3.xml><?xml version="1.0" encoding="utf-8"?>
-<p:notes xmlns:a="http://schemas.openxmlformats.org/drawingml/2006/main" xmlns:p="http://schemas.openxmlformats.org/presentationml/2006/main" xmlns:r="http://schemas.openxmlformats.org/officeDocument/2006/relationships">
-  <p:cSld>
-    <p:spTree>
-      <p:nvGrpSpPr>
-        <p:cNvPr id="1" name=""/>
-        <p:cNvGrpSpPr/>
-        <p:nvPr/>
-      </p:nvGrpSpPr>
-      <p:grpSpPr>
-        <a:xfrm>
-          <a:off x="0" y="0"/>
-          <a:ext cx="0" cy="0"/>
-          <a:chOff x="0" y="0"/>
-          <a:chExt cx="0" cy="0"/>
-        </a:xfrm>
-      </p:grpSpPr>
-      <p:sp>
-        <p:nvSpPr>
-          <p:cNvPr id="2" name="Slide Image Placeholder 1"/>
-          <p:cNvSpPr>
-            <a:spLocks noGrp="1"/>
-          </p:cNvSpPr>
-          <p:nvPr>
-            <p:ph type="sldImg" idx="2"/>
-          </p:nvPr>
-        </p:nvSpPr>
-        <p:spPr/>
-      </p:sp>
-      <p:sp>
-        <p:nvSpPr>
-          <p:cNvPr id="3" name="Notes Placeholder 2"/>
-          <p:cNvSpPr>
-            <a:spLocks noGrp="1"/>
-          </p:cNvSpPr>
-          <p:nvPr>
-            <p:ph type="body" idx="3" sz="quarter"/>
-          </p:nvPr>
-        </p:nvSpPr>
-        <p:spPr/>
-        <p:txBody>
-          <a:bodyPr/>
-          <a:lstStyle/>
-          <a:p>
-            <a:r>
-              <a:t>Nadie tiene que contestar: solo pensarlo.</a:t>
-            </a:r>
-          </a:p>
-        </p:txBody>
-      </p:sp>
-      <p:sp>
-        <p:nvSpPr>
-          <p:cNvPr id="4" name="Slide Number Placeholder 3"/>
-          <p:cNvSpPr>
-            <a:spLocks noGrp="1"/>
-          </p:cNvSpPr>
-          <p:nvPr>
-            <p:ph type="sldNum" idx="5" sz="quarter"/>
-          </p:nvPr>
-        </p:nvSpPr>
-        <p:spPr/>
-      </p:sp>
-    </p:spTree>
-  </p:cSld>
-  <p:clrMapOvr>
-    <a:masterClrMapping/>
-  </p:clrMapOvr>
-</p:notes>
-</file>
-
-<file path=ppt/notesSlides/notesSlide4.xml><?xml version="1.0" encoding="utf-8"?>
-<p:notes xmlns:a="http://schemas.openxmlformats.org/drawingml/2006/main" xmlns:p="http://schemas.openxmlformats.org/presentationml/2006/main" xmlns:r="http://schemas.openxmlformats.org/officeDocument/2006/relationships">
-  <p:cSld>
-    <p:spTree>
-      <p:nvGrpSpPr>
-        <p:cNvPr id="1" name=""/>
-        <p:cNvGrpSpPr/>
-        <p:nvPr/>
-      </p:nvGrpSpPr>
-      <p:grpSpPr>
-        <a:xfrm>
-          <a:off x="0" y="0"/>
-          <a:ext cx="0" cy="0"/>
-          <a:chOff x="0" y="0"/>
-          <a:chExt cx="0" cy="0"/>
-        </a:xfrm>
-      </p:grpSpPr>
-      <p:sp>
-        <p:nvSpPr>
-          <p:cNvPr id="2" name="Slide Image Placeholder 1"/>
-          <p:cNvSpPr>
-            <a:spLocks noGrp="1"/>
-          </p:cNvSpPr>
-          <p:nvPr>
-            <p:ph type="sldImg" idx="2"/>
-          </p:nvPr>
-        </p:nvSpPr>
-        <p:spPr/>
-      </p:sp>
-      <p:sp>
-        <p:nvSpPr>
-          <p:cNvPr id="3" name="Notes Placeholder 2"/>
-          <p:cNvSpPr>
-            <a:spLocks noGrp="1"/>
-          </p:cNvSpPr>
-          <p:nvPr>
-            <p:ph type="body" idx="3" sz="quarter"/>
-          </p:nvPr>
-        </p:nvSpPr>
-        <p:spPr/>
-        <p:txBody>
-          <a:bodyPr/>
-          <a:lstStyle/>
-          <a:p>
-            <a:r>
-              <a:t>Dejar unos segundos para que piensen la respuesta fácil antes de enseñar los pasos.</a:t>
-            </a:r>
-          </a:p>
-        </p:txBody>
-      </p:sp>
-      <p:sp>
-        <p:nvSpPr>
-          <p:cNvPr id="4" name="Slide Number Placeholder 3"/>
-          <p:cNvSpPr>
-            <a:spLocks noGrp="1"/>
-          </p:cNvSpPr>
-          <p:nvPr>
-            <p:ph type="sldNum" idx="5" sz="quarter"/>
-          </p:nvPr>
-        </p:nvSpPr>
-        <p:spPr/>
-      </p:sp>
-    </p:spTree>
-  </p:cSld>
-  <p:clrMapOvr>
-    <a:masterClrMapping/>
-  </p:clrMapOvr>
-</p:notes>
-</file>
-
-<file path=ppt/notesSlides/notesSlide5.xml><?xml version="1.0" encoding="utf-8"?>
-<p:notes xmlns:a="http://schemas.openxmlformats.org/drawingml/2006/main" xmlns:p="http://schemas.openxmlformats.org/presentationml/2006/main" xmlns:r="http://schemas.openxmlformats.org/officeDocument/2006/relationships">
-  <p:cSld>
-    <p:spTree>
-      <p:nvGrpSpPr>
-        <p:cNvPr id="1" name=""/>
-        <p:cNvGrpSpPr/>
-        <p:nvPr/>
-      </p:nvGrpSpPr>
-      <p:grpSpPr>
-        <a:xfrm>
-          <a:off x="0" y="0"/>
-          <a:ext cx="0" cy="0"/>
-          <a:chOff x="0" y="0"/>
-          <a:chExt cx="0" cy="0"/>
-        </a:xfrm>
-      </p:grpSpPr>
-      <p:sp>
-        <p:nvSpPr>
-          <p:cNvPr id="2" name="Slide Image Placeholder 1"/>
-          <p:cNvSpPr>
-            <a:spLocks noGrp="1"/>
-          </p:cNvSpPr>
-          <p:nvPr>
-            <p:ph type="sldImg" idx="2"/>
-          </p:nvPr>
-        </p:nvSpPr>
-        <p:spPr/>
-      </p:sp>
-      <p:sp>
-        <p:nvSpPr>
-          <p:cNvPr id="3" name="Notes Placeholder 2"/>
-          <p:cNvSpPr>
-            <a:spLocks noGrp="1"/>
-          </p:cNvSpPr>
-          <p:nvPr>
-            <p:ph type="body" idx="3" sz="quarter"/>
-          </p:nvPr>
-        </p:nvSpPr>
-        <p:spPr/>
-        <p:txBody>
-          <a:bodyPr/>
-          <a:lstStyle/>
-          <a:p>
-            <a:r>
-              <a:t>Dejar 2 minutos para que lo escriban. La diapositiva siguiente muestra el resumen.</a:t>
-            </a:r>
-          </a:p>
-        </p:txBody>
-      </p:sp>
-      <p:sp>
-        <p:nvSpPr>
-          <p:cNvPr id="4" name="Slide Number Placeholder 3"/>
-          <p:cNvSpPr>
-            <a:spLocks noGrp="1"/>
-          </p:cNvSpPr>
-          <p:nvPr>
-            <p:ph type="sldNum" idx="5" sz="quarter"/>
-          </p:nvPr>
-        </p:nvSpPr>
-        <p:spPr/>
-      </p:sp>
-    </p:spTree>
-  </p:cSld>
-  <p:clrMapOvr>
-    <a:masterClrMapping/>
-  </p:clrMapOvr>
-</p:notes>
-</file>
-
-<file path=ppt/notesSlides/notesSlide6.xml><?xml version="1.0" encoding="utf-8"?>
-<p:notes xmlns:a="http://schemas.openxmlformats.org/drawingml/2006/main" xmlns:p="http://schemas.openxmlformats.org/presentationml/2006/main" xmlns:r="http://schemas.openxmlformats.org/officeDocument/2006/relationships">
-  <p:cSld>
-    <p:spTree>
-      <p:nvGrpSpPr>
-        <p:cNvPr id="1" name=""/>
-        <p:cNvGrpSpPr/>
-        <p:nvPr/>
-      </p:nvGrpSpPr>
-      <p:grpSpPr>
-        <a:xfrm>
-          <a:off x="0" y="0"/>
-          <a:ext cx="0" cy="0"/>
-          <a:chOff x="0" y="0"/>
-          <a:chExt cx="0" cy="0"/>
-        </a:xfrm>
-      </p:grpSpPr>
-      <p:sp>
-        <p:nvSpPr>
-          <p:cNvPr id="2" name="Slide Image Placeholder 1"/>
-          <p:cNvSpPr>
-            <a:spLocks noGrp="1"/>
-          </p:cNvSpPr>
-          <p:nvPr>
-            <p:ph type="sldImg" idx="2"/>
-          </p:nvPr>
-        </p:nvSpPr>
-        <p:spPr/>
-      </p:sp>
-      <p:sp>
-        <p:nvSpPr>
-          <p:cNvPr id="3" name="Notes Placeholder 2"/>
-          <p:cNvSpPr>
-            <a:spLocks noGrp="1"/>
-          </p:cNvSpPr>
-          <p:nvPr>
-            <p:ph type="body" idx="3" sz="quarter"/>
-          </p:nvPr>
-        </p:nvSpPr>
-        <p:spPr/>
-        <p:txBody>
-          <a:bodyPr/>
-          <a:lstStyle/>
-          <a:p>
-            <a:r>
-              <a:t>Buscar: «muestra representativa explicación» · «encuestas sesgadas ejemplos»</a:t>
-            </a:r>
-          </a:p>
-        </p:txBody>
-      </p:sp>
-      <p:sp>
-        <p:nvSpPr>
-          <p:cNvPr id="4" name="Slide Number Placeholder 3"/>
-          <p:cNvSpPr>
-            <a:spLocks noGrp="1"/>
-          </p:cNvSpPr>
-          <p:nvPr>
-            <p:ph type="sldNum" idx="5" sz="quarter"/>
-          </p:nvPr>
-        </p:nvSpPr>
-        <p:spPr/>
-      </p:sp>
-    </p:spTree>
-  </p:cSld>
-  <p:clrMapOvr>
-    <a:masterClrMapping/>
-  </p:clrMapOvr>
-</p:notes>
 </file>
 
 <file path=ppt/slideLayouts/slideLayout1.xml><?xml version="1.0" encoding="utf-8"?>

--- a/curso/pptx/S39.pptx
+++ b/curso/pptx/S39.pptx
@@ -7488,7 +7488,7 @@
                           </a:solidFill>
                           <a:latin typeface="Nunito Sans"/>
                         </a:rPr>
-                        <a:t>Los 3 amigos de Kevin</a:t>
+                        <a:t>Los 3 amigos de un chico</a:t>
                       </a:r>
                     </a:p>
                   </a:txBody>

--- a/curso/pptx/S39.pptx
+++ b/curso/pptx/S39.pptx
@@ -3535,7 +3535,7 @@
                 </a:solidFill>
                 <a:latin typeface="Nunito Sans"/>
               </a:rPr>
-              <a:t>PENSAMIENTO CRÍTICO · SESIÓN 39 · UNIDAD 7 · NÚMEROS QUE ENGAÑAN</a:t>
+              <a:t>PENSAMIENTO CRÍTICO · SESIÓN 39 · UNIDAD 7 · EMOCIONES, CONFLICTOS Y DILEMAS</a:t>
             </a:r>
           </a:p>
         </p:txBody>
@@ -3574,7 +3574,7 @@
                 </a:solidFill>
                 <a:latin typeface="Fredoka"/>
               </a:rPr>
-              <a:t>Encuestas y muestras</a:t>
+              <a:t>El conflicto no es una pelea</a:t>
             </a:r>
           </a:p>
         </p:txBody>
@@ -3613,7 +3613,7 @@
                 </a:solidFill>
                 <a:latin typeface="Nunito Sans"/>
               </a:rPr>
-              <a:t>Una encuesta es más fiable si la muestra se parece a la población; muchas respuestas no arreglan una muestra sesgada.</a:t>
+              <a:t>Un conflicto es un choque de intereses o necesidades; se puede afrontar de varias maneras, y ayuda distinguir lo que pido de lo que necesito.</a:t>
             </a:r>
           </a:p>
         </p:txBody>
@@ -3632,7 +3632,7 @@
     <p:bg>
       <p:bgPr>
         <a:solidFill>
-          <a:srgbClr val="FBF7EF"/>
+          <a:srgbClr val="1F2A44"/>
         </a:solidFill>
         <a:effectLst/>
       </p:bgPr>
@@ -3652,8 +3652,8 @@
         </p:nvSpPr>
         <p:spPr>
           <a:xfrm>
-            <a:off x="640000" y="380000"/>
-            <a:ext cx="10912000" cy="420000"/>
+            <a:off x="640000" y="2300000"/>
+            <a:ext cx="10912000" cy="500000"/>
           </a:xfrm>
           <a:prstGeom prst="rect">
             <a:avLst/>
@@ -3668,17 +3668,17 @@
           <a:p>
             <a:pPr>
               <a:spcAft>
-                <a:spcPts val="630"/>
+                <a:spcPts val="810"/>
               </a:spcAft>
             </a:pPr>
             <a:r>
-              <a:rPr sz="1400" b="1">
-                <a:solidFill>
-                  <a:srgbClr val="E8793A"/>
-                </a:solidFill>
-                <a:latin typeface="Nunito Sans"/>
-              </a:rPr>
-              <a:t>BLOQUE 2 · CASOS RESUELTOS</a:t>
+              <a:rPr sz="1800" b="1">
+                <a:solidFill>
+                  <a:srgbClr val="F4B183"/>
+                </a:solidFill>
+                <a:latin typeface="Nunito Sans"/>
+              </a:rPr>
+              <a:t>BLOQUE 2</a:t>
             </a:r>
           </a:p>
         </p:txBody>
@@ -3691,7 +3691,7 @@
         </p:nvSpPr>
         <p:spPr>
           <a:xfrm>
-            <a:off x="640000" y="760000"/>
+            <a:off x="640000" y="2800000"/>
             <a:ext cx="10912000" cy="800000"/>
           </a:xfrm>
           <a:prstGeom prst="rect">
@@ -3707,222 +3707,17 @@
           <a:p>
             <a:pPr>
               <a:spcAft>
-                <a:spcPts val="1710"/>
+                <a:spcPts val="2160"/>
               </a:spcAft>
             </a:pPr>
             <a:r>
-              <a:rPr sz="3800" b="1">
-                <a:solidFill>
-                  <a:srgbClr val="1F2A44"/>
+              <a:rPr sz="4800" b="1">
+                <a:solidFill>
+                  <a:srgbClr val="FBF7EF"/>
                 </a:solidFill>
                 <a:latin typeface="Fredoka"/>
               </a:rPr>
-              <a:t>Caso 1 · La encuesta del principio</a:t>
-            </a:r>
-          </a:p>
-        </p:txBody>
-      </p:sp>
-      <p:sp>
-        <p:nvSpPr>
-          <p:cNvPr id="4" name="Rectangle 3"/>
-          <p:cNvSpPr/>
-          <p:nvPr/>
-        </p:nvSpPr>
-        <p:spPr>
-          <a:xfrm>
-            <a:off x="640000" y="1600000"/>
-            <a:ext cx="10912000" cy="1100000"/>
-          </a:xfrm>
-          <a:prstGeom prst="rect">
-            <a:avLst/>
-          </a:prstGeom>
-          <a:solidFill>
-            <a:srgbClr val="FFFFFF"/>
-          </a:solidFill>
-          <a:ln>
-            <a:noFill/>
-          </a:ln>
-        </p:spPr>
-        <p:style>
-          <a:lnRef idx="1">
-            <a:schemeClr val="accent1"/>
-          </a:lnRef>
-          <a:fillRef idx="3">
-            <a:schemeClr val="accent1"/>
-          </a:fillRef>
-          <a:effectRef idx="2">
-            <a:schemeClr val="accent1"/>
-          </a:effectRef>
-          <a:fontRef idx="minor">
-            <a:schemeClr val="lt1"/>
-          </a:fontRef>
-        </p:style>
-        <p:txBody>
-          <a:bodyPr rtlCol="0" anchor="ctr"/>
-          <a:lstStyle/>
-          <a:p>
-            <a:pPr algn="ctr"/>
-          </a:p>
-        </p:txBody>
-      </p:sp>
-      <p:sp>
-        <p:nvSpPr>
-          <p:cNvPr id="5" name="TextBox 4"/>
-          <p:cNvSpPr txBox="1"/>
-          <p:nvPr/>
-        </p:nvSpPr>
-        <p:spPr>
-          <a:xfrm>
-            <a:off x="840000" y="1650000"/>
-            <a:ext cx="10512000" cy="1000000"/>
-          </a:xfrm>
-          <a:prstGeom prst="rect">
-            <a:avLst/>
-          </a:prstGeom>
-          <a:noFill/>
-        </p:spPr>
-        <p:txBody>
-          <a:bodyPr wrap="square" anchor="ctr">
-            <a:spAutoFit/>
-          </a:bodyPr>
-          <a:lstStyle/>
-          <a:p>
-            <a:pPr>
-              <a:spcAft>
-                <a:spcPts val="1170"/>
-              </a:spcAft>
-            </a:pPr>
-            <a:r>
-              <a:rPr sz="2600" b="1">
-                <a:solidFill>
-                  <a:srgbClr val="1F2A44"/>
-                </a:solidFill>
-                <a:latin typeface="Nunito Sans"/>
-              </a:rPr>
-              <a:t>Una youtuber de videojuegos pregunta a sus seguidores si les gustan los videojuegos. El 95 % dice que sí.</a:t>
-            </a:r>
-          </a:p>
-        </p:txBody>
-      </p:sp>
-      <p:sp>
-        <p:nvSpPr>
-          <p:cNvPr id="6" name="TextBox 5"/>
-          <p:cNvSpPr txBox="1"/>
-          <p:nvPr/>
-        </p:nvSpPr>
-        <p:spPr>
-          <a:xfrm>
-            <a:off x="640000" y="2900000"/>
-            <a:ext cx="10912000" cy="3500000"/>
-          </a:xfrm>
-          <a:prstGeom prst="rect">
-            <a:avLst/>
-          </a:prstGeom>
-          <a:noFill/>
-        </p:spPr>
-        <p:txBody>
-          <a:bodyPr wrap="square">
-            <a:spAutoFit/>
-          </a:bodyPr>
-          <a:lstStyle/>
-          <a:p>
-            <a:pPr>
-              <a:spcAft>
-                <a:spcPts val="1080"/>
-              </a:spcAft>
-            </a:pPr>
-            <a:r>
-              <a:rPr sz="2400" b="1">
-                <a:solidFill>
-                  <a:srgbClr val="E8793A"/>
-                </a:solidFill>
-                <a:latin typeface="Nunito Sans"/>
-              </a:rPr>
-              <a:t>1. </a:t>
-            </a:r>
-            <a:r>
-              <a:rPr sz="2400" b="0">
-                <a:solidFill>
-                  <a:srgbClr val="1F2A44"/>
-                </a:solidFill>
-                <a:latin typeface="Nunito Sans"/>
-              </a:rPr>
-              <a:t>¿A quiénes preguntó? A sus seguidores: gente que ya ve vídeos de videojuegos.</a:t>
-            </a:r>
-          </a:p>
-          <a:p>
-            <a:pPr>
-              <a:spcAft>
-                <a:spcPts val="1080"/>
-              </a:spcAft>
-            </a:pPr>
-            <a:r>
-              <a:rPr sz="2400" b="1">
-                <a:solidFill>
-                  <a:srgbClr val="E8793A"/>
-                </a:solidFill>
-                <a:latin typeface="Nunito Sans"/>
-              </a:rPr>
-              <a:t>2. </a:t>
-            </a:r>
-            <a:r>
-              <a:rPr sz="2400" b="0">
-                <a:solidFill>
-                  <a:srgbClr val="1F2A44"/>
-                </a:solidFill>
-                <a:latin typeface="Nunito Sans"/>
-              </a:rPr>
-              <a:t>¿Se parecen a todos los jóvenes? No: quien no juega no la sigue.</a:t>
-            </a:r>
-          </a:p>
-          <a:p>
-            <a:pPr>
-              <a:spcAft>
-                <a:spcPts val="1080"/>
-              </a:spcAft>
-            </a:pPr>
-            <a:r>
-              <a:rPr sz="2400" b="1">
-                <a:solidFill>
-                  <a:srgbClr val="E8793A"/>
-                </a:solidFill>
-                <a:latin typeface="Nunito Sans"/>
-              </a:rPr>
-              <a:t>3. </a:t>
-            </a:r>
-            <a:r>
-              <a:rPr sz="2400" b="0">
-                <a:solidFill>
-                  <a:srgbClr val="1F2A44"/>
-                </a:solidFill>
-                <a:latin typeface="Nunito Sans"/>
-              </a:rPr>
-              <a:t>La muestra está sesgada: se inclina hacia un lado.</a:t>
-            </a:r>
-          </a:p>
-          <a:p>
-            <a:pPr>
-              <a:spcAft>
-                <a:spcPts val="1080"/>
-              </a:spcAft>
-            </a:pPr>
-            <a:r>
-              <a:rPr sz="2400" b="1">
-                <a:solidFill>
-                  <a:srgbClr val="E8793A"/>
-                </a:solidFill>
-                <a:latin typeface="Nunito Sans"/>
-              </a:rPr>
-              <a:t>4. </a:t>
-            </a:r>
-            <a:r>
-              <a:rPr sz="2400" b="0">
-                <a:solidFill>
-                  <a:srgbClr val="1F2A44"/>
-                </a:solidFill>
-                <a:latin typeface="Nunito Sans"/>
-              </a:rPr>
-              <a:t>Conclusión: el 95 % habla de sus seguidores, no de todos los jóvenes.</a:t>
+              <a:t>Casos resueltos</a:t>
             </a:r>
           </a:p>
         </p:txBody>
@@ -4026,7 +3821,7 @@
                 </a:solidFill>
                 <a:latin typeface="Fredoka"/>
               </a:rPr>
-              <a:t>Caso 2 · «9 de cada 10»</a:t>
+              <a:t>Caso 1 · El ordenador de casa</a:t>
             </a:r>
           </a:p>
         </p:txBody>
@@ -4108,7 +3903,7 @@
                 </a:solidFill>
                 <a:latin typeface="Nunito Sans"/>
               </a:rPr>
-              <a:t>Anuncio: «9 de cada 10 usuarios recomiendan nuestras zapatillas». En letra pequeña: «Encuesta a 10 clientes de nuestra tienda». (Ejemplo inventado.)</a:t>
+              <a:t>Postura de la chica: «Quiero el ordenador ya». Postura de su hermano: «Lo quiero yo». Su madre les pregunta a cada uno: «¿Para qué lo necesitas?».</a:t>
             </a:r>
           </a:p>
         </p:txBody>
@@ -4156,7 +3951,7 @@
                 </a:solidFill>
                 <a:latin typeface="Nunito Sans"/>
               </a:rPr>
-              <a:t>¿A cuántos? Solo a 10 personas.</a:t>
+              <a:t>Interés de la chica: entregar un trabajo antes de las 20:00.</a:t>
             </a:r>
           </a:p>
           <a:p>
@@ -4181,7 +3976,7 @@
                 </a:solidFill>
                 <a:latin typeface="Nunito Sans"/>
               </a:rPr>
-              <a:t>¿A quiénes? A clientes que ya las compraron en su tienda.</a:t>
+              <a:t>Interés de su hermano: jugar online con su cuadrilla, que queda a las 21:00.</a:t>
             </a:r>
           </a:p>
           <a:p>
@@ -4206,7 +4001,7 @@
                 </a:solidFill>
                 <a:latin typeface="Nunito Sans"/>
               </a:rPr>
-              <a:t>Muestra pequeña y sesgada: quien las compró ya tenía buena opinión de ellas.</a:t>
+              <a:t>Las posturas chocaban; los intereses, no: caben los dos en la tarde.</a:t>
             </a:r>
           </a:p>
           <a:p>
@@ -4231,7 +4026,7 @@
                 </a:solidFill>
                 <a:latin typeface="Nunito Sans"/>
               </a:rPr>
-              <a:t>Conclusión: «9 de cada 10» suena a mucho, pero son 9 personas elegidas por la marca.</a:t>
+              <a:t>Conclusión: la chica lo usa hasta las 20:00 y su hermano después. Mirar el interés permite colaborar.</a:t>
             </a:r>
           </a:p>
         </p:txBody>
@@ -4335,7 +4130,7 @@
                 </a:solidFill>
                 <a:latin typeface="Fredoka"/>
               </a:rPr>
-              <a:t>Caso 3 · La pregunta que empuja</a:t>
+              <a:t>Caso 2 · El asiento del autobús</a:t>
             </a:r>
           </a:p>
         </p:txBody>
@@ -4417,7 +4212,7 @@
                 </a:solidFill>
                 <a:latin typeface="Nunito Sans"/>
               </a:rPr>
-              <a:t>Encuesta del instituto (inventada): «¿Estás de acuerdo en que el recreo es demasiado corto y hay que alargarlo?»</a:t>
+              <a:t>Excursión a Urdaibai. Un chico quiere ir en la ventanilla. A una compañera le da igual, pero él se marea si no mira fuera.</a:t>
             </a:r>
           </a:p>
         </p:txBody>
@@ -4465,7 +4260,7 @@
                 </a:solidFill>
                 <a:latin typeface="Nunito Sans"/>
               </a:rPr>
-              <a:t>La pregunta ya dice lo que piensa quien pregunta: «demasiado corto».</a:t>
+              <a:t>¿Qué actitud tiene sentido para la compañera? Ceder.</a:t>
             </a:r>
           </a:p>
           <a:p>
@@ -4490,7 +4285,7 @@
                 </a:solidFill>
                 <a:latin typeface="Nunito Sans"/>
               </a:rPr>
-              <a:t>Empuja a contestar que sí.</a:t>
+              <a:t>¿Por qué ceder? A ella casi no le importa y a él le importa mucho.</a:t>
             </a:r>
           </a:p>
           <a:p>
@@ -4515,7 +4310,7 @@
                 </a:solidFill>
                 <a:latin typeface="Nunito Sans"/>
               </a:rPr>
-              <a:t>Una pregunta neutral sería: «¿Qué te parece la duración del recreo?»</a:t>
+              <a:t>Ceder no es perder: es elegir bien cuando el tema es pequeño para ti.</a:t>
             </a:r>
           </a:p>
           <a:p>
@@ -4540,7 +4335,7 @@
                 </a:solidFill>
                 <a:latin typeface="Nunito Sans"/>
               </a:rPr>
-              <a:t>Conclusión: además de a quién se pregunta, importa cómo se pregunta. Lo vimos en la sesión 4.</a:t>
+              <a:t>Conclusión: ninguna actitud es siempre la buena. La buena depende de cuánto le importa a cada uno.</a:t>
             </a:r>
           </a:p>
         </p:txBody>
@@ -4644,7 +4439,7 @@
                 </a:solidFill>
                 <a:latin typeface="Fredoka"/>
               </a:rPr>
-              <a:t>⚠ Dos millones de respuestas</a:t>
+              <a:t>⚠ La cuadrilla perfecta</a:t>
             </a:r>
           </a:p>
         </p:txBody>
@@ -4726,7 +4521,7 @@
                 </a:solidFill>
                 <a:latin typeface="Nunito Sans"/>
               </a:rPr>
-              <a:t>EE. UU., 1936. Una revista recibe más de dos millones de respuestas sobre quién ganará las elecciones. Otra encuesta pregunta a muchas menos personas, elegidas para parecerse al país.</a:t>
+              <a:t>Un chico presume: «En mi cuadrilla nunca hay conflictos». Pero una del grupo siempre cede, y otro se calla cuando algo no le gusta.</a:t>
             </a:r>
           </a:p>
         </p:txBody>
@@ -4774,7 +4569,7 @@
                 </a:solidFill>
                 <a:latin typeface="Nunito Sans"/>
               </a:rPr>
-              <a:t>¿Cuál acertó? La de dos millones, ¿no?</a:t>
+              <a:t>Si nunca discuten, ¿es una cuadrilla sin conflictos?</a:t>
             </a:r>
           </a:p>
           <a:p>
@@ -4799,7 +4594,7 @@
                 </a:solidFill>
                 <a:latin typeface="Nunito Sans"/>
               </a:rPr>
-              <a:t>No: la revista falló por mucho. Quienes le contestaron no se parecían al conjunto de votantes.</a:t>
+              <a:t>Parece que sí: no hay gritos ni peleas.</a:t>
             </a:r>
           </a:p>
           <a:p>
@@ -4824,7 +4619,7 @@
                 </a:solidFill>
                 <a:latin typeface="Nunito Sans"/>
               </a:rPr>
-              <a:t>La encuesta pequeña acertó el ganador: su muestra se parecía más al país.</a:t>
+              <a:t>Pero una siempre cede y otro siempre evita. Los conflictos están, solo que escondidos.</a:t>
             </a:r>
           </a:p>
           <a:p>
@@ -4849,7 +4644,7 @@
                 </a:solidFill>
                 <a:latin typeface="Nunito Sans"/>
               </a:rPr>
-              <a:t>Más respuestas no arreglan una muestra sesgada: repiten el mismo error muchas más veces.</a:t>
+              <a:t>Un conflicto escondido no desaparece: puede crecer y estallar más tarde.</a:t>
             </a:r>
           </a:p>
           <a:p>
@@ -4874,7 +4669,7 @@
                 </a:solidFill>
                 <a:latin typeface="Nunito Sans"/>
               </a:rPr>
-              <a:t>Conclusión: primero, ¿a quiénes?; luego, ¿a cuántos? Una muestra grande pero sesgada sigue fallando.</a:t>
+              <a:t>Conclusión: que no haya peleas no significa que no haya conflictos. A veces falta alguien que diga «no».</a:t>
             </a:r>
           </a:p>
         </p:txBody>
@@ -5130,7 +4925,7 @@
                 </a:solidFill>
                 <a:latin typeface="Nunito Sans"/>
               </a:rPr>
-              <a:t>Una muestra es la parte del grupo a la que se pregunta.</a:t>
+              <a:t>Un conflicto es un choque de intereses o necesidades; es normal y no es una pelea.</a:t>
             </a:r>
           </a:p>
           <a:p>
@@ -5155,7 +4950,7 @@
                 </a:solidFill>
                 <a:latin typeface="Nunito Sans"/>
               </a:rPr>
-              <a:t>Importa a cuántos, pero más a quiénes: una muestra grande pero sesgada sigue fallando.</a:t>
+              <a:t>Hay cinco actitudes: evitar, ceder, competir, pactar y colaborar; ninguna vale siempre.</a:t>
             </a:r>
           </a:p>
           <a:p>
@@ -5180,7 +4975,7 @@
                 </a:solidFill>
                 <a:latin typeface="Nunito Sans"/>
               </a:rPr>
-              <a:t>Mira también cómo se hizo la pregunta: puede empujar la respuesta.</a:t>
+              <a:t>La postura es lo que pido; el interés, lo que necesito. Preguntar «¿para qué?» ayuda.</a:t>
             </a:r>
           </a:p>
         </p:txBody>
@@ -5284,7 +5079,7 @@
                 </a:solidFill>
                 <a:latin typeface="Fredoka"/>
               </a:rPr>
-              <a:t>Qué es una muestra y cuándo es fiable una encuesta</a:t>
+              <a:t>Estilos para afrontar un conflicto y la diferencia entre posturas e intereses</a:t>
             </a:r>
           </a:p>
         </p:txBody>
@@ -5323,7 +5118,7 @@
                 </a:solidFill>
                 <a:latin typeface="Nunito Sans"/>
               </a:rPr>
-              <a:t>Reforzar la idea de muestra con otra explicación y otros ejemplos.</a:t>
+              <a:t>Que vean otros ejemplos de las cinco actitudes y de cómo buscar el interés detrás de la postura.</a:t>
             </a:r>
           </a:p>
         </p:txBody>
@@ -5981,7 +5776,7 @@
                 </a:solidFill>
                 <a:latin typeface="Nunito Sans"/>
               </a:rPr>
-              <a:t>Un gráfico también engaña por lo que deja ______.  (sesión 38)</a:t>
+              <a:t>Las emociones ______ de lo que nos importa, pero no mandan.  (sesión 38)</a:t>
             </a:r>
           </a:p>
           <a:p>
@@ -6006,7 +5801,7 @@
                 </a:solidFill>
                 <a:latin typeface="Nunito Sans"/>
               </a:rPr>
-              <a:t>En un gráfico de barras, lo normal es que el eje vertical empiece en ______.  (sesión 38)</a:t>
+              <a:t>Una emoción es una reacción ______ del cuerpo y de la mente ante algo que nos importa.  (sesión 38)</a:t>
             </a:r>
           </a:p>
           <a:p>
@@ -6031,7 +5826,7 @@
                 </a:solidFill>
                 <a:latin typeface="Nunito Sans"/>
               </a:rPr>
-              <a:t>Fiarse de un experto de ______, en su campo, no es falacia de autoridad.  (sesión 27)</a:t>
+              <a:t>La pendiente resbaladiza empieza con algo pequeño y acaba en algo ______.  (sesión 27)</a:t>
             </a:r>
           </a:p>
         </p:txBody>
@@ -6183,7 +5978,7 @@
                 </a:solidFill>
                 <a:latin typeface="Nunito Sans"/>
               </a:rPr>
-              <a:t>Un gráfico también engaña por lo que deja </a:t>
+              <a:t>Las emociones </a:t>
             </a:r>
             <a:r>
               <a:rPr sz="2600" b="1">
@@ -6192,7 +5987,7 @@
                 </a:solidFill>
                 <a:latin typeface="Nunito Sans"/>
               </a:rPr>
-              <a:t>fuera</a:t>
+              <a:t>informan</a:t>
             </a:r>
             <a:r>
               <a:rPr sz="2600" b="0">
@@ -6201,7 +5996,7 @@
                 </a:solidFill>
                 <a:latin typeface="Nunito Sans"/>
               </a:rPr>
-              <a:t>.  (sesión 38)</a:t>
+              <a:t> de lo que nos importa, pero no mandan.  (sesión 38)</a:t>
             </a:r>
           </a:p>
           <a:p>
@@ -6226,7 +6021,7 @@
                 </a:solidFill>
                 <a:latin typeface="Nunito Sans"/>
               </a:rPr>
-              <a:t>En un gráfico de barras, lo normal es que el eje vertical empiece en </a:t>
+              <a:t>Una emoción es una reacción </a:t>
             </a:r>
             <a:r>
               <a:rPr sz="2600" b="1">
@@ -6235,7 +6030,7 @@
                 </a:solidFill>
                 <a:latin typeface="Nunito Sans"/>
               </a:rPr>
-              <a:t>0</a:t>
+              <a:t>rápida</a:t>
             </a:r>
             <a:r>
               <a:rPr sz="2600" b="0">
@@ -6244,7 +6039,7 @@
                 </a:solidFill>
                 <a:latin typeface="Nunito Sans"/>
               </a:rPr>
-              <a:t>.  (sesión 38)</a:t>
+              <a:t> del cuerpo y de la mente ante algo que nos importa.  (sesión 38)</a:t>
             </a:r>
           </a:p>
           <a:p>
@@ -6269,7 +6064,7 @@
                 </a:solidFill>
                 <a:latin typeface="Nunito Sans"/>
               </a:rPr>
-              <a:t>Fiarse de un experto de </a:t>
+              <a:t>La pendiente resbaladiza empieza con algo pequeño y acaba en algo </a:t>
             </a:r>
             <a:r>
               <a:rPr sz="2600" b="1">
@@ -6278,7 +6073,7 @@
                 </a:solidFill>
                 <a:latin typeface="Nunito Sans"/>
               </a:rPr>
-              <a:t>verdad</a:t>
+              <a:t>terrible</a:t>
             </a:r>
             <a:r>
               <a:rPr sz="2600" b="0">
@@ -6287,7 +6082,7 @@
                 </a:solidFill>
                 <a:latin typeface="Nunito Sans"/>
               </a:rPr>
-              <a:t>, en su campo, no es falacia de autoridad.  (sesión 27)</a:t>
+              <a:t>.  (sesión 27)</a:t>
             </a:r>
           </a:p>
         </p:txBody>
@@ -6434,7 +6229,7 @@
                 </a:solidFill>
                 <a:latin typeface="Nunito Sans"/>
               </a:rPr>
-              <a:t>Una youtuber de videojuegos pregunta a sus seguidores: «¿Te gustan los videojuegos?». El 95 % dice que sí.</a:t>
+              <a:t>Una chica y su hermano quieren el ordenador de casa a la misma hora. Cada uno grita: «¡Lo pedí yo primero!». Nadie cede.</a:t>
             </a:r>
           </a:p>
         </p:txBody>
@@ -6473,7 +6268,7 @@
                 </a:solidFill>
                 <a:latin typeface="Nunito Sans"/>
               </a:rPr>
-              <a:t>¿Significa eso que al 95 % de los jóvenes les gustan los videojuegos?</a:t>
+              <a:t>¿Qué quiere de verdad cada uno? ¿Hay alguna salida en la que ganen los dos?</a:t>
             </a:r>
           </a:p>
         </p:txBody>
@@ -6577,7 +6372,7 @@
                 </a:solidFill>
                 <a:latin typeface="Fredoka"/>
               </a:rPr>
-              <a:t>Qué es una muestra</a:t>
+              <a:t>Qué es un conflicto</a:t>
             </a:r>
           </a:p>
         </p:txBody>
@@ -6642,7 +6437,7 @@
                 </a:solidFill>
                 <a:latin typeface="Nunito Sans"/>
               </a:rPr>
-              <a:t>BLOQUE 1 · QUÉ ES UNA MUESTRA</a:t>
+              <a:t>BLOQUE 1 · QUÉ ES UN CONFLICTO</a:t>
             </a:r>
           </a:p>
         </p:txBody>
@@ -6681,7 +6476,7 @@
                 </a:solidFill>
                 <a:latin typeface="Fredoka"/>
               </a:rPr>
-              <a:t>Muestra</a:t>
+              <a:t>Conflicto</a:t>
             </a:r>
           </a:p>
         </p:txBody>
@@ -6763,7 +6558,7 @@
                 </a:solidFill>
                 <a:latin typeface="Nunito Sans"/>
               </a:rPr>
-              <a:t>Una muestra es el grupo de personas a las que se pregunta, para sacar conclusiones sobre un grupo mayor.</a:t>
+              <a:t>Es un choque entre personas que quieren o necesitan cosas que, en ese momento, parecen incompatibles.</a:t>
             </a:r>
           </a:p>
         </p:txBody>
@@ -6805,13 +6600,22 @@
               <a:t>• </a:t>
             </a:r>
             <a:r>
+              <a:rPr sz="2800" b="0">
+                <a:solidFill>
+                  <a:srgbClr val="1F2A44"/>
+                </a:solidFill>
+                <a:latin typeface="Nunito Sans"/>
+              </a:rPr>
+              <a:t>Es </a:t>
+            </a:r>
+            <a:r>
               <a:rPr sz="2800" b="1">
                 <a:solidFill>
                   <a:srgbClr val="1F2A44"/>
                 </a:solidFill>
                 <a:latin typeface="Nunito Sans"/>
               </a:rPr>
-              <a:t>Población:</a:t>
+              <a:t>normal</a:t>
             </a:r>
             <a:r>
               <a:rPr sz="2800" b="0">
@@ -6820,7 +6624,7 @@
                 </a:solidFill>
                 <a:latin typeface="Nunito Sans"/>
               </a:rPr>
-              <a:t> todo el grupo del que se habla</a:t>
+              <a:t>: aparece en cualquier grupo</a:t>
             </a:r>
           </a:p>
           <a:p>
@@ -6839,22 +6643,22 @@
               <a:t>• </a:t>
             </a:r>
             <a:r>
+              <a:rPr sz="2800" b="0">
+                <a:solidFill>
+                  <a:srgbClr val="1F2A44"/>
+                </a:solidFill>
+                <a:latin typeface="Nunito Sans"/>
+              </a:rPr>
+              <a:t>No es lo mismo que una </a:t>
+            </a:r>
+            <a:r>
               <a:rPr sz="2800" b="1">
                 <a:solidFill>
                   <a:srgbClr val="1F2A44"/>
                 </a:solidFill>
                 <a:latin typeface="Nunito Sans"/>
               </a:rPr>
-              <a:t>Muestra:</a:t>
-            </a:r>
-            <a:r>
-              <a:rPr sz="2800" b="0">
-                <a:solidFill>
-                  <a:srgbClr val="1F2A44"/>
-                </a:solidFill>
-                <a:latin typeface="Nunito Sans"/>
-              </a:rPr>
-              <a:t> la parte a la que se pregunta</a:t>
+              <a:t>pelea</a:t>
             </a:r>
           </a:p>
           <a:p>
@@ -6879,41 +6683,16 @@
                 </a:solidFill>
                 <a:latin typeface="Nunito Sans"/>
               </a:rPr>
-              <a:t>Como probar una cucharada para saber cómo está la sopa (bien removida)</a:t>
-            </a:r>
-          </a:p>
-          <a:p>
-            <a:pPr>
-              <a:spcAft>
-                <a:spcPts val="1260"/>
-              </a:spcAft>
-            </a:pPr>
+              <a:t>La pelea es una mala forma de </a:t>
+            </a:r>
             <a:r>
               <a:rPr sz="2800" b="1">
                 <a:solidFill>
-                  <a:srgbClr val="E8793A"/>
-                </a:solidFill>
-                <a:latin typeface="Nunito Sans"/>
-              </a:rPr>
-              <a:t>• </a:t>
-            </a:r>
-            <a:r>
-              <a:rPr sz="2800" b="1">
-                <a:solidFill>
                   <a:srgbClr val="1F2A44"/>
                 </a:solidFill>
                 <a:latin typeface="Nunito Sans"/>
               </a:rPr>
-              <a:t>Al azar:</a:t>
-            </a:r>
-            <a:r>
-              <a:rPr sz="2800" b="0">
-                <a:solidFill>
-                  <a:srgbClr val="1F2A44"/>
-                </a:solidFill>
-                <a:latin typeface="Nunito Sans"/>
-              </a:rPr>
-              <a:t> por sorteo, sin elegir a quién</a:t>
+              <a:t>afrontarlo</a:t>
             </a:r>
           </a:p>
         </p:txBody>
@@ -6978,7 +6757,7 @@
                 </a:solidFill>
                 <a:latin typeface="Nunito Sans"/>
               </a:rPr>
-              <a:t>BLOQUE 1 · QUÉ ES UNA MUESTRA</a:t>
+              <a:t>BLOQUE 1 · QUÉ ES UN CONFLICTO</a:t>
             </a:r>
           </a:p>
         </p:txBody>
@@ -7017,179 +6796,378 @@
                 </a:solidFill>
                 <a:latin typeface="Fredoka"/>
               </a:rPr>
-              <a:t>Tres preguntas a una encuesta</a:t>
-            </a:r>
-          </a:p>
-        </p:txBody>
-      </p:sp>
-      <p:sp>
-        <p:nvSpPr>
-          <p:cNvPr id="4" name="TextBox 3"/>
-          <p:cNvSpPr txBox="1"/>
+              <a:t>Tipos de conflicto según lo que choca</a:t>
+            </a:r>
+          </a:p>
+        </p:txBody>
+      </p:sp>
+      <p:graphicFrame>
+        <p:nvGraphicFramePr>
+          <p:cNvPr id="4" name="Table 3"/>
+          <p:cNvGraphicFramePr>
+            <a:graphicFrameLocks noGrp="1"/>
+          </p:cNvGraphicFramePr>
           <p:nvPr/>
-        </p:nvSpPr>
-        <p:spPr>
-          <a:xfrm>
-            <a:off x="640000" y="1650000"/>
-            <a:ext cx="10912000" cy="4808000"/>
-          </a:xfrm>
-          <a:prstGeom prst="rect">
-            <a:avLst/>
-          </a:prstGeom>
-          <a:noFill/>
-        </p:spPr>
-        <p:txBody>
-          <a:bodyPr wrap="square">
-            <a:spAutoFit/>
-          </a:bodyPr>
-          <a:lstStyle/>
-          <a:p>
-            <a:pPr>
-              <a:spcAft>
-                <a:spcPts val="1260"/>
-              </a:spcAft>
-            </a:pPr>
-            <a:r>
-              <a:rPr sz="2800" b="1">
-                <a:solidFill>
-                  <a:srgbClr val="E8793A"/>
-                </a:solidFill>
-                <a:latin typeface="Nunito Sans"/>
-              </a:rPr>
-              <a:t>• </a:t>
-            </a:r>
-            <a:r>
-              <a:rPr sz="2800" b="1">
-                <a:solidFill>
-                  <a:srgbClr val="1F2A44"/>
-                </a:solidFill>
-                <a:latin typeface="Nunito Sans"/>
-              </a:rPr>
-              <a:t>¿A cuántos?</a:t>
-            </a:r>
-            <a:r>
-              <a:rPr sz="2800" b="0">
-                <a:solidFill>
-                  <a:srgbClr val="1F2A44"/>
-                </a:solidFill>
-                <a:latin typeface="Nunito Sans"/>
-              </a:rPr>
-              <a:t> Con 5 personas se puede decir muy poco de miles</a:t>
-            </a:r>
-          </a:p>
-          <a:p>
-            <a:pPr>
-              <a:spcAft>
-                <a:spcPts val="1260"/>
-              </a:spcAft>
-            </a:pPr>
-            <a:r>
-              <a:rPr sz="2800" b="1">
-                <a:solidFill>
-                  <a:srgbClr val="E8793A"/>
-                </a:solidFill>
-                <a:latin typeface="Nunito Sans"/>
-              </a:rPr>
-              <a:t>• </a:t>
-            </a:r>
-            <a:r>
-              <a:rPr sz="2800" b="1">
-                <a:solidFill>
-                  <a:srgbClr val="1F2A44"/>
-                </a:solidFill>
-                <a:latin typeface="Nunito Sans"/>
-              </a:rPr>
-              <a:t>¿A quiénes?</a:t>
-            </a:r>
-            <a:r>
-              <a:rPr sz="2800" b="0">
-                <a:solidFill>
-                  <a:srgbClr val="1F2A44"/>
-                </a:solidFill>
-                <a:latin typeface="Nunito Sans"/>
-              </a:rPr>
-              <a:t> La muestra tiene que parecerse a la población</a:t>
-            </a:r>
-          </a:p>
-          <a:p>
-            <a:pPr>
-              <a:spcAft>
-                <a:spcPts val="1260"/>
-              </a:spcAft>
-            </a:pPr>
-            <a:r>
-              <a:rPr sz="2800" b="1">
-                <a:solidFill>
-                  <a:srgbClr val="E8793A"/>
-                </a:solidFill>
-                <a:latin typeface="Nunito Sans"/>
-              </a:rPr>
-              <a:t>• </a:t>
-            </a:r>
-            <a:r>
-              <a:rPr sz="2800" b="1">
-                <a:solidFill>
-                  <a:srgbClr val="1F2A44"/>
-                </a:solidFill>
-                <a:latin typeface="Nunito Sans"/>
-              </a:rPr>
-              <a:t>¿Cómo se preguntó?</a:t>
-            </a:r>
-            <a:r>
-              <a:rPr sz="2800" b="0">
-                <a:solidFill>
-                  <a:srgbClr val="1F2A44"/>
-                </a:solidFill>
-                <a:latin typeface="Nunito Sans"/>
-              </a:rPr>
-              <a:t> La pregunta también puede empujar la respuesta</a:t>
-            </a:r>
-          </a:p>
-          <a:p>
-            <a:pPr>
-              <a:spcAft>
-                <a:spcPts val="1260"/>
-              </a:spcAft>
-            </a:pPr>
-            <a:r>
-              <a:rPr sz="2800" b="1">
-                <a:solidFill>
-                  <a:srgbClr val="E8793A"/>
-                </a:solidFill>
-                <a:latin typeface="Nunito Sans"/>
-              </a:rPr>
-              <a:t>• </a:t>
-            </a:r>
-            <a:r>
-              <a:rPr sz="2800" b="0">
-                <a:solidFill>
-                  <a:srgbClr val="1F2A44"/>
-                </a:solidFill>
-                <a:latin typeface="Nunito Sans"/>
-              </a:rPr>
-              <a:t>Una muestra que no se parece está </a:t>
-            </a:r>
-            <a:r>
-              <a:rPr sz="2800" b="1">
-                <a:solidFill>
-                  <a:srgbClr val="1F2A44"/>
-                </a:solidFill>
-                <a:latin typeface="Nunito Sans"/>
-              </a:rPr>
-              <a:t>sesgada</a:t>
-            </a:r>
-            <a:r>
-              <a:rPr sz="2800" b="0">
-                <a:solidFill>
-                  <a:srgbClr val="1F2A44"/>
-                </a:solidFill>
-                <a:latin typeface="Nunito Sans"/>
-              </a:rPr>
-              <a:t>: torcida, inclinada hacia un lado</a:t>
-            </a:r>
-          </a:p>
-        </p:txBody>
-      </p:sp>
+        </p:nvGraphicFramePr>
+        <p:xfrm>
+          <a:off x="640000" y="1700000"/>
+          <a:ext cx="10912000" cy="3000000"/>
+        </p:xfrm>
+        <a:graphic>
+          <a:graphicData uri="http://schemas.openxmlformats.org/drawingml/2006/table">
+            <a:tbl>
+              <a:tblPr firstRow="1" bandRow="1">
+                <a:tableStyleId>{5C22544A-7EE6-4342-B048-85BDC9FD1C3A}</a:tableStyleId>
+              </a:tblPr>
+              <a:tblGrid>
+                <a:gridCol w="3637333"/>
+                <a:gridCol w="3637333"/>
+                <a:gridCol w="3637334"/>
+              </a:tblGrid>
+              <a:tr h="600000">
+                <a:tc>
+                  <a:txBody>
+                    <a:bodyPr/>
+                    <a:lstStyle/>
+                    <a:p>
+                      <a:r>
+                        <a:rPr sz="2000" b="1">
+                          <a:solidFill>
+                            <a:srgbClr val="FBF7EF"/>
+                          </a:solidFill>
+                          <a:latin typeface="Fredoka"/>
+                        </a:rPr>
+                        <a:t>Tipo</a:t>
+                      </a:r>
+                    </a:p>
+                  </a:txBody>
+                  <a:tcPr>
+                    <a:solidFill>
+                      <a:srgbClr val="1F2A44"/>
+                    </a:solidFill>
+                  </a:tcPr>
+                </a:tc>
+                <a:tc>
+                  <a:txBody>
+                    <a:bodyPr/>
+                    <a:lstStyle/>
+                    <a:p>
+                      <a:r>
+                        <a:rPr sz="2000" b="1">
+                          <a:solidFill>
+                            <a:srgbClr val="FBF7EF"/>
+                          </a:solidFill>
+                          <a:latin typeface="Fredoka"/>
+                        </a:rPr>
+                        <a:t>Qué choca</a:t>
+                      </a:r>
+                    </a:p>
+                  </a:txBody>
+                  <a:tcPr>
+                    <a:solidFill>
+                      <a:srgbClr val="1F2A44"/>
+                    </a:solidFill>
+                  </a:tcPr>
+                </a:tc>
+                <a:tc>
+                  <a:txBody>
+                    <a:bodyPr/>
+                    <a:lstStyle/>
+                    <a:p>
+                      <a:r>
+                        <a:rPr sz="2000" b="1">
+                          <a:solidFill>
+                            <a:srgbClr val="FBF7EF"/>
+                          </a:solidFill>
+                          <a:latin typeface="Fredoka"/>
+                        </a:rPr>
+                        <a:t>Ejemplo</a:t>
+                      </a:r>
+                    </a:p>
+                  </a:txBody>
+                  <a:tcPr>
+                    <a:solidFill>
+                      <a:srgbClr val="1F2A44"/>
+                    </a:solidFill>
+                  </a:tcPr>
+                </a:tc>
+              </a:tr>
+              <a:tr h="600000">
+                <a:tc>
+                  <a:txBody>
+                    <a:bodyPr/>
+                    <a:lstStyle/>
+                    <a:p>
+                      <a:r>
+                        <a:rPr sz="2000" b="1">
+                          <a:solidFill>
+                            <a:srgbClr val="1F2A44"/>
+                          </a:solidFill>
+                          <a:latin typeface="Nunito Sans"/>
+                        </a:rPr>
+                        <a:t>De recursos</a:t>
+                      </a:r>
+                    </a:p>
+                  </a:txBody>
+                  <a:tcPr>
+                    <a:solidFill>
+                      <a:srgbClr val="FFFFFF"/>
+                    </a:solidFill>
+                  </a:tcPr>
+                </a:tc>
+                <a:tc>
+                  <a:txBody>
+                    <a:bodyPr/>
+                    <a:lstStyle/>
+                    <a:p>
+                      <a:r>
+                        <a:rPr sz="2000" b="0">
+                          <a:solidFill>
+                            <a:srgbClr val="1F2A44"/>
+                          </a:solidFill>
+                          <a:latin typeface="Nunito Sans"/>
+                        </a:rPr>
+                        <a:t>Hay una cosa y la quieren dos</a:t>
+                      </a:r>
+                    </a:p>
+                  </a:txBody>
+                  <a:tcPr>
+                    <a:solidFill>
+                      <a:srgbClr val="FFFFFF"/>
+                    </a:solidFill>
+                  </a:tcPr>
+                </a:tc>
+                <a:tc>
+                  <a:txBody>
+                    <a:bodyPr/>
+                    <a:lstStyle/>
+                    <a:p>
+                      <a:r>
+                        <a:rPr sz="2000" b="0">
+                          <a:solidFill>
+                            <a:srgbClr val="1F2A44"/>
+                          </a:solidFill>
+                          <a:latin typeface="Nunito Sans"/>
+                        </a:rPr>
+                        <a:t>El ordenador, el mando, el balón</a:t>
+                      </a:r>
+                    </a:p>
+                  </a:txBody>
+                  <a:tcPr>
+                    <a:solidFill>
+                      <a:srgbClr val="FFFFFF"/>
+                    </a:solidFill>
+                  </a:tcPr>
+                </a:tc>
+              </a:tr>
+              <a:tr h="600000">
+                <a:tc>
+                  <a:txBody>
+                    <a:bodyPr/>
+                    <a:lstStyle/>
+                    <a:p>
+                      <a:r>
+                        <a:rPr sz="2000" b="1">
+                          <a:solidFill>
+                            <a:srgbClr val="1F2A44"/>
+                          </a:solidFill>
+                          <a:latin typeface="Nunito Sans"/>
+                        </a:rPr>
+                        <a:t>De necesidades</a:t>
+                      </a:r>
+                    </a:p>
+                  </a:txBody>
+                  <a:tcPr>
+                    <a:solidFill>
+                      <a:srgbClr val="EAF0F7"/>
+                    </a:solidFill>
+                  </a:tcPr>
+                </a:tc>
+                <a:tc>
+                  <a:txBody>
+                    <a:bodyPr/>
+                    <a:lstStyle/>
+                    <a:p>
+                      <a:r>
+                        <a:rPr sz="2000" b="0">
+                          <a:solidFill>
+                            <a:srgbClr val="1F2A44"/>
+                          </a:solidFill>
+                          <a:latin typeface="Nunito Sans"/>
+                        </a:rPr>
+                        <a:t>Uno necesita algo que molesta al otro</a:t>
+                      </a:r>
+                    </a:p>
+                  </a:txBody>
+                  <a:tcPr>
+                    <a:solidFill>
+                      <a:srgbClr val="EAF0F7"/>
+                    </a:solidFill>
+                  </a:tcPr>
+                </a:tc>
+                <a:tc>
+                  <a:txBody>
+                    <a:bodyPr/>
+                    <a:lstStyle/>
+                    <a:p>
+                      <a:r>
+                        <a:rPr sz="2000" b="0">
+                          <a:solidFill>
+                            <a:srgbClr val="1F2A44"/>
+                          </a:solidFill>
+                          <a:latin typeface="Nunito Sans"/>
+                        </a:rPr>
+                        <a:t>Estudiar en silencio y escuchar música</a:t>
+                      </a:r>
+                    </a:p>
+                  </a:txBody>
+                  <a:tcPr>
+                    <a:solidFill>
+                      <a:srgbClr val="EAF0F7"/>
+                    </a:solidFill>
+                  </a:tcPr>
+                </a:tc>
+              </a:tr>
+              <a:tr h="600000">
+                <a:tc>
+                  <a:txBody>
+                    <a:bodyPr/>
+                    <a:lstStyle/>
+                    <a:p>
+                      <a:r>
+                        <a:rPr sz="2000" b="1">
+                          <a:solidFill>
+                            <a:srgbClr val="1F2A44"/>
+                          </a:solidFill>
+                          <a:latin typeface="Nunito Sans"/>
+                        </a:rPr>
+                        <a:t>De ideas o valores</a:t>
+                      </a:r>
+                    </a:p>
+                  </a:txBody>
+                  <a:tcPr>
+                    <a:solidFill>
+                      <a:srgbClr val="FFFFFF"/>
+                    </a:solidFill>
+                  </a:tcPr>
+                </a:tc>
+                <a:tc>
+                  <a:txBody>
+                    <a:bodyPr/>
+                    <a:lstStyle/>
+                    <a:p>
+                      <a:r>
+                        <a:rPr sz="2000" b="0">
+                          <a:solidFill>
+                            <a:srgbClr val="1F2A44"/>
+                          </a:solidFill>
+                          <a:latin typeface="Nunito Sans"/>
+                        </a:rPr>
+                        <a:t>Piensan distinto sobre lo importante</a:t>
+                      </a:r>
+                    </a:p>
+                  </a:txBody>
+                  <a:tcPr>
+                    <a:solidFill>
+                      <a:srgbClr val="FFFFFF"/>
+                    </a:solidFill>
+                  </a:tcPr>
+                </a:tc>
+                <a:tc>
+                  <a:txBody>
+                    <a:bodyPr/>
+                    <a:lstStyle/>
+                    <a:p>
+                      <a:r>
+                        <a:rPr sz="2000" b="0">
+                          <a:solidFill>
+                            <a:srgbClr val="1F2A44"/>
+                          </a:solidFill>
+                          <a:latin typeface="Nunito Sans"/>
+                        </a:rPr>
+                        <a:t>Qué es justo en un reparto</a:t>
+                      </a:r>
+                    </a:p>
+                  </a:txBody>
+                  <a:tcPr>
+                    <a:solidFill>
+                      <a:srgbClr val="FFFFFF"/>
+                    </a:solidFill>
+                  </a:tcPr>
+                </a:tc>
+              </a:tr>
+              <a:tr h="600000">
+                <a:tc>
+                  <a:txBody>
+                    <a:bodyPr/>
+                    <a:lstStyle/>
+                    <a:p>
+                      <a:r>
+                        <a:rPr sz="2000" b="1">
+                          <a:solidFill>
+                            <a:srgbClr val="1F2A44"/>
+                          </a:solidFill>
+                          <a:latin typeface="Nunito Sans"/>
+                        </a:rPr>
+                        <a:t>Malentendido</a:t>
+                      </a:r>
+                    </a:p>
+                  </a:txBody>
+                  <a:tcPr>
+                    <a:solidFill>
+                      <a:srgbClr val="EAF0F7"/>
+                    </a:solidFill>
+                  </a:tcPr>
+                </a:tc>
+                <a:tc>
+                  <a:txBody>
+                    <a:bodyPr/>
+                    <a:lstStyle/>
+                    <a:p>
+                      <a:r>
+                        <a:rPr sz="2000" b="0">
+                          <a:solidFill>
+                            <a:srgbClr val="1F2A44"/>
+                          </a:solidFill>
+                          <a:latin typeface="Nunito Sans"/>
+                        </a:rPr>
+                        <a:t>Uno entiende mal lo que el otro dijo</a:t>
+                      </a:r>
+                    </a:p>
+                  </a:txBody>
+                  <a:tcPr>
+                    <a:solidFill>
+                      <a:srgbClr val="EAF0F7"/>
+                    </a:solidFill>
+                  </a:tcPr>
+                </a:tc>
+                <a:tc>
+                  <a:txBody>
+                    <a:bodyPr/>
+                    <a:lstStyle/>
+                    <a:p>
+                      <a:r>
+                        <a:rPr sz="2000" b="0">
+                          <a:solidFill>
+                            <a:srgbClr val="1F2A44"/>
+                          </a:solidFill>
+                          <a:latin typeface="Nunito Sans"/>
+                        </a:rPr>
+                        <a:t>Un mensaje leído con otro tono</a:t>
+                      </a:r>
+                    </a:p>
+                  </a:txBody>
+                  <a:tcPr>
+                    <a:solidFill>
+                      <a:srgbClr val="EAF0F7"/>
+                    </a:solidFill>
+                  </a:tcPr>
+                </a:tc>
+              </a:tr>
+            </a:tbl>
+          </a:graphicData>
+        </a:graphic>
+      </p:graphicFrame>
     </p:spTree>
   </p:cSld>
   <p:clrMapOvr>
@@ -7250,7 +7228,7 @@
                 </a:solidFill>
                 <a:latin typeface="Nunito Sans"/>
               </a:rPr>
-              <a:t>BLOQUE 1 · QUÉ ES UNA MUESTRA</a:t>
+              <a:t>BLOQUE 1 · QUÉ ES UN CONFLICTO</a:t>
             </a:r>
           </a:p>
         </p:txBody>
@@ -7289,310 +7267,243 @@
                 </a:solidFill>
                 <a:latin typeface="Fredoka"/>
               </a:rPr>
-              <a:t>Muestras malas y mejores</a:t>
-            </a:r>
-          </a:p>
-        </p:txBody>
-      </p:sp>
-      <p:graphicFrame>
-        <p:nvGraphicFramePr>
-          <p:cNvPr id="4" name="Table 3"/>
-          <p:cNvGraphicFramePr>
-            <a:graphicFrameLocks noGrp="1"/>
-          </p:cNvGraphicFramePr>
+              <a:t>Cinco actitudes ante un conflicto</a:t>
+            </a:r>
+          </a:p>
+        </p:txBody>
+      </p:sp>
+      <p:sp>
+        <p:nvSpPr>
+          <p:cNvPr id="4" name="TextBox 3"/>
+          <p:cNvSpPr txBox="1"/>
           <p:nvPr/>
-        </p:nvGraphicFramePr>
-        <p:xfrm>
-          <a:off x="640000" y="1700000"/>
-          <a:ext cx="10912000" cy="2400000"/>
-        </p:xfrm>
-        <a:graphic>
-          <a:graphicData uri="http://schemas.openxmlformats.org/drawingml/2006/table">
-            <a:tbl>
-              <a:tblPr firstRow="1" bandRow="1">
-                <a:tableStyleId>{5C22544A-7EE6-4342-B048-85BDC9FD1C3A}</a:tableStyleId>
-              </a:tblPr>
-              <a:tblGrid>
-                <a:gridCol w="3637333"/>
-                <a:gridCol w="3637333"/>
-                <a:gridCol w="3637334"/>
-              </a:tblGrid>
-              <a:tr h="600000">
-                <a:tc>
-                  <a:txBody>
-                    <a:bodyPr/>
-                    <a:lstStyle/>
-                    <a:p>
-                      <a:r>
-                        <a:rPr sz="2000" b="1">
-                          <a:solidFill>
-                            <a:srgbClr val="FBF7EF"/>
-                          </a:solidFill>
-                          <a:latin typeface="Fredoka"/>
-                        </a:rPr>
-                        <a:t>Quiero saber…</a:t>
-                      </a:r>
-                    </a:p>
-                  </a:txBody>
-                  <a:tcPr>
-                    <a:solidFill>
-                      <a:srgbClr val="1F2A44"/>
-                    </a:solidFill>
-                  </a:tcPr>
-                </a:tc>
-                <a:tc>
-                  <a:txBody>
-                    <a:bodyPr/>
-                    <a:lstStyle/>
-                    <a:p>
-                      <a:r>
-                        <a:rPr sz="2000" b="1">
-                          <a:solidFill>
-                            <a:srgbClr val="FBF7EF"/>
-                          </a:solidFill>
-                          <a:latin typeface="Fredoka"/>
-                        </a:rPr>
-                        <a:t>Muestra mala</a:t>
-                      </a:r>
-                    </a:p>
-                  </a:txBody>
-                  <a:tcPr>
-                    <a:solidFill>
-                      <a:srgbClr val="1F2A44"/>
-                    </a:solidFill>
-                  </a:tcPr>
-                </a:tc>
-                <a:tc>
-                  <a:txBody>
-                    <a:bodyPr/>
-                    <a:lstStyle/>
-                    <a:p>
-                      <a:r>
-                        <a:rPr sz="2000" b="1">
-                          <a:solidFill>
-                            <a:srgbClr val="FBF7EF"/>
-                          </a:solidFill>
-                          <a:latin typeface="Fredoka"/>
-                        </a:rPr>
-                        <a:t>Muestra mejor</a:t>
-                      </a:r>
-                    </a:p>
-                  </a:txBody>
-                  <a:tcPr>
-                    <a:solidFill>
-                      <a:srgbClr val="1F2A44"/>
-                    </a:solidFill>
-                  </a:tcPr>
-                </a:tc>
-              </a:tr>
-              <a:tr h="600000">
-                <a:tc>
-                  <a:txBody>
-                    <a:bodyPr/>
-                    <a:lstStyle/>
-                    <a:p>
-                      <a:r>
-                        <a:rPr sz="2000" b="0">
-                          <a:solidFill>
-                            <a:srgbClr val="1F2A44"/>
-                          </a:solidFill>
-                          <a:latin typeface="Nunito Sans"/>
-                        </a:rPr>
-                        <a:t>Qué deporte prefiere el alumnado</a:t>
-                      </a:r>
-                    </a:p>
-                  </a:txBody>
-                  <a:tcPr>
-                    <a:solidFill>
-                      <a:srgbClr val="FFFFFF"/>
-                    </a:solidFill>
-                  </a:tcPr>
-                </a:tc>
-                <a:tc>
-                  <a:txBody>
-                    <a:bodyPr/>
-                    <a:lstStyle/>
-                    <a:p>
-                      <a:r>
-                        <a:rPr sz="2000" b="0">
-                          <a:solidFill>
-                            <a:srgbClr val="1F2A44"/>
-                          </a:solidFill>
-                          <a:latin typeface="Nunito Sans"/>
-                        </a:rPr>
-                        <a:t>Solo el equipo de fútbol</a:t>
-                      </a:r>
-                    </a:p>
-                  </a:txBody>
-                  <a:tcPr>
-                    <a:solidFill>
-                      <a:srgbClr val="FFFFFF"/>
-                    </a:solidFill>
-                  </a:tcPr>
-                </a:tc>
-                <a:tc>
-                  <a:txBody>
-                    <a:bodyPr/>
-                    <a:lstStyle/>
-                    <a:p>
-                      <a:r>
-                        <a:rPr sz="2000" b="0">
-                          <a:solidFill>
-                            <a:srgbClr val="1F2A44"/>
-                          </a:solidFill>
-                          <a:latin typeface="Nunito Sans"/>
-                        </a:rPr>
-                        <a:t>Alumnos al azar de todos los cursos</a:t>
-                      </a:r>
-                    </a:p>
-                  </a:txBody>
-                  <a:tcPr>
-                    <a:solidFill>
-                      <a:srgbClr val="FFFFFF"/>
-                    </a:solidFill>
-                  </a:tcPr>
-                </a:tc>
-              </a:tr>
-              <a:tr h="600000">
-                <a:tc>
-                  <a:txBody>
-                    <a:bodyPr/>
-                    <a:lstStyle/>
-                    <a:p>
-                      <a:r>
-                        <a:rPr sz="2000" b="0">
-                          <a:solidFill>
-                            <a:srgbClr val="1F2A44"/>
-                          </a:solidFill>
-                          <a:latin typeface="Nunito Sans"/>
-                        </a:rPr>
-                        <a:t>Si gusta el comedor</a:t>
-                      </a:r>
-                    </a:p>
-                  </a:txBody>
-                  <a:tcPr>
-                    <a:solidFill>
-                      <a:srgbClr val="EAF0F7"/>
-                    </a:solidFill>
-                  </a:tcPr>
-                </a:tc>
-                <a:tc>
-                  <a:txBody>
-                    <a:bodyPr/>
-                    <a:lstStyle/>
-                    <a:p>
-                      <a:r>
-                        <a:rPr sz="2000" b="0">
-                          <a:solidFill>
-                            <a:srgbClr val="1F2A44"/>
-                          </a:solidFill>
-                          <a:latin typeface="Nunito Sans"/>
-                        </a:rPr>
-                        <a:t>Los 3 amigos de un chico</a:t>
-                      </a:r>
-                    </a:p>
-                  </a:txBody>
-                  <a:tcPr>
-                    <a:solidFill>
-                      <a:srgbClr val="EAF0F7"/>
-                    </a:solidFill>
-                  </a:tcPr>
-                </a:tc>
-                <a:tc>
-                  <a:txBody>
-                    <a:bodyPr/>
-                    <a:lstStyle/>
-                    <a:p>
-                      <a:r>
-                        <a:rPr sz="2000" b="0">
-                          <a:solidFill>
-                            <a:srgbClr val="1F2A44"/>
-                          </a:solidFill>
-                          <a:latin typeface="Nunito Sans"/>
-                        </a:rPr>
-                        <a:t>100 alumnos elegidos al azar</a:t>
-                      </a:r>
-                    </a:p>
-                  </a:txBody>
-                  <a:tcPr>
-                    <a:solidFill>
-                      <a:srgbClr val="EAF0F7"/>
-                    </a:solidFill>
-                  </a:tcPr>
-                </a:tc>
-              </a:tr>
-              <a:tr h="600000">
-                <a:tc>
-                  <a:txBody>
-                    <a:bodyPr/>
-                    <a:lstStyle/>
-                    <a:p>
-                      <a:r>
-                        <a:rPr sz="2000" b="0">
-                          <a:solidFill>
-                            <a:srgbClr val="1F2A44"/>
-                          </a:solidFill>
-                          <a:latin typeface="Nunito Sans"/>
-                        </a:rPr>
-                        <a:t>Cuánto usan el móvil en 2.º ESO</a:t>
-                      </a:r>
-                    </a:p>
-                  </a:txBody>
-                  <a:tcPr>
-                    <a:solidFill>
-                      <a:srgbClr val="FFFFFF"/>
-                    </a:solidFill>
-                  </a:tcPr>
-                </a:tc>
-                <a:tc>
-                  <a:txBody>
-                    <a:bodyPr/>
-                    <a:lstStyle/>
-                    <a:p>
-                      <a:r>
-                        <a:rPr sz="2000" b="0">
-                          <a:solidFill>
-                            <a:srgbClr val="1F2A44"/>
-                          </a:solidFill>
-                          <a:latin typeface="Nunito Sans"/>
-                        </a:rPr>
-                        <a:t>Solo quien contesta en Instagram</a:t>
-                      </a:r>
-                    </a:p>
-                  </a:txBody>
-                  <a:tcPr>
-                    <a:solidFill>
-                      <a:srgbClr val="FFFFFF"/>
-                    </a:solidFill>
-                  </a:tcPr>
-                </a:tc>
-                <a:tc>
-                  <a:txBody>
-                    <a:bodyPr/>
-                    <a:lstStyle/>
-                    <a:p>
-                      <a:r>
-                        <a:rPr sz="2000" b="0">
-                          <a:solidFill>
-                            <a:srgbClr val="1F2A44"/>
-                          </a:solidFill>
-                          <a:latin typeface="Nunito Sans"/>
-                        </a:rPr>
-                        <a:t>Todos los grupos de 2.º, encuesta anónima</a:t>
-                      </a:r>
-                    </a:p>
-                  </a:txBody>
-                  <a:tcPr>
-                    <a:solidFill>
-                      <a:srgbClr val="FFFFFF"/>
-                    </a:solidFill>
-                  </a:tcPr>
-                </a:tc>
-              </a:tr>
-            </a:tbl>
-          </a:graphicData>
-        </a:graphic>
-      </p:graphicFrame>
+        </p:nvSpPr>
+        <p:spPr>
+          <a:xfrm>
+            <a:off x="840000" y="1730000"/>
+            <a:ext cx="10512000" cy="1000000"/>
+          </a:xfrm>
+          <a:prstGeom prst="rect">
+            <a:avLst/>
+          </a:prstGeom>
+          <a:noFill/>
+        </p:spPr>
+        <p:txBody>
+          <a:bodyPr wrap="square" anchor="ctr">
+            <a:spAutoFit/>
+          </a:bodyPr>
+          <a:lstStyle/>
+          <a:p>
+            <a:pPr>
+              <a:spcAft>
+                <a:spcPts val="1080"/>
+              </a:spcAft>
+            </a:pPr>
+            <a:r>
+              <a:rPr sz="2400" b="0">
+                <a:solidFill>
+                  <a:srgbClr val="1F2A44"/>
+                </a:solidFill>
+                <a:latin typeface="Nunito Sans"/>
+              </a:rPr>
+              <a:t>Es un modelo conocido, de Thomas y Kilmann (1974). No es una ley: sirve para pensar.</a:t>
+            </a:r>
+          </a:p>
+        </p:txBody>
+      </p:sp>
+      <p:sp>
+        <p:nvSpPr>
+          <p:cNvPr id="5" name="TextBox 4"/>
+          <p:cNvSpPr txBox="1"/>
+          <p:nvPr/>
+        </p:nvSpPr>
+        <p:spPr>
+          <a:xfrm>
+            <a:off x="640000" y="3000000"/>
+            <a:ext cx="10912000" cy="3458000"/>
+          </a:xfrm>
+          <a:prstGeom prst="rect">
+            <a:avLst/>
+          </a:prstGeom>
+          <a:noFill/>
+        </p:spPr>
+        <p:txBody>
+          <a:bodyPr wrap="square">
+            <a:spAutoFit/>
+          </a:bodyPr>
+          <a:lstStyle/>
+          <a:p>
+            <a:pPr>
+              <a:spcAft>
+                <a:spcPts val="1260"/>
+              </a:spcAft>
+            </a:pPr>
+            <a:r>
+              <a:rPr sz="2800" b="1">
+                <a:solidFill>
+                  <a:srgbClr val="E8793A"/>
+                </a:solidFill>
+                <a:latin typeface="Nunito Sans"/>
+              </a:rPr>
+              <a:t>• </a:t>
+            </a:r>
+            <a:r>
+              <a:rPr sz="2800" b="1">
+                <a:solidFill>
+                  <a:srgbClr val="1F2A44"/>
+                </a:solidFill>
+                <a:latin typeface="Nunito Sans"/>
+              </a:rPr>
+              <a:t>Evitar:</a:t>
+            </a:r>
+            <a:r>
+              <a:rPr sz="2800" b="0">
+                <a:solidFill>
+                  <a:srgbClr val="1F2A44"/>
+                </a:solidFill>
+                <a:latin typeface="Nunito Sans"/>
+              </a:rPr>
+              <a:t> hago como si no pasara nada.</a:t>
+            </a:r>
+          </a:p>
+          <a:p>
+            <a:pPr>
+              <a:spcAft>
+                <a:spcPts val="1260"/>
+              </a:spcAft>
+            </a:pPr>
+            <a:r>
+              <a:rPr sz="2800" b="1">
+                <a:solidFill>
+                  <a:srgbClr val="E8793A"/>
+                </a:solidFill>
+                <a:latin typeface="Nunito Sans"/>
+              </a:rPr>
+              <a:t>• </a:t>
+            </a:r>
+            <a:r>
+              <a:rPr sz="2800" b="1">
+                <a:solidFill>
+                  <a:srgbClr val="1F2A44"/>
+                </a:solidFill>
+                <a:latin typeface="Nunito Sans"/>
+              </a:rPr>
+              <a:t>Ceder:</a:t>
+            </a:r>
+            <a:r>
+              <a:rPr sz="2800" b="0">
+                <a:solidFill>
+                  <a:srgbClr val="1F2A44"/>
+                </a:solidFill>
+                <a:latin typeface="Nunito Sans"/>
+              </a:rPr>
+              <a:t> dejo que el otro consiga lo suyo.</a:t>
+            </a:r>
+          </a:p>
+          <a:p>
+            <a:pPr>
+              <a:spcAft>
+                <a:spcPts val="1260"/>
+              </a:spcAft>
+            </a:pPr>
+            <a:r>
+              <a:rPr sz="2800" b="1">
+                <a:solidFill>
+                  <a:srgbClr val="E8793A"/>
+                </a:solidFill>
+                <a:latin typeface="Nunito Sans"/>
+              </a:rPr>
+              <a:t>• </a:t>
+            </a:r>
+            <a:r>
+              <a:rPr sz="2800" b="1">
+                <a:solidFill>
+                  <a:srgbClr val="1F2A44"/>
+                </a:solidFill>
+                <a:latin typeface="Nunito Sans"/>
+              </a:rPr>
+              <a:t>Competir:</a:t>
+            </a:r>
+            <a:r>
+              <a:rPr sz="2800" b="0">
+                <a:solidFill>
+                  <a:srgbClr val="1F2A44"/>
+                </a:solidFill>
+                <a:latin typeface="Nunito Sans"/>
+              </a:rPr>
+              <a:t> intento ganar yo, aunque el otro pierda.</a:t>
+            </a:r>
+          </a:p>
+          <a:p>
+            <a:pPr>
+              <a:spcAft>
+                <a:spcPts val="1260"/>
+              </a:spcAft>
+            </a:pPr>
+            <a:r>
+              <a:rPr sz="2800" b="1">
+                <a:solidFill>
+                  <a:srgbClr val="E8793A"/>
+                </a:solidFill>
+                <a:latin typeface="Nunito Sans"/>
+              </a:rPr>
+              <a:t>• </a:t>
+            </a:r>
+            <a:r>
+              <a:rPr sz="2800" b="1">
+                <a:solidFill>
+                  <a:srgbClr val="1F2A44"/>
+                </a:solidFill>
+                <a:latin typeface="Nunito Sans"/>
+              </a:rPr>
+              <a:t>Pactar:</a:t>
+            </a:r>
+            <a:r>
+              <a:rPr sz="2800" b="0">
+                <a:solidFill>
+                  <a:srgbClr val="1F2A44"/>
+                </a:solidFill>
+                <a:latin typeface="Nunito Sans"/>
+              </a:rPr>
+              <a:t> cada uno renuncia a una parte.</a:t>
+            </a:r>
+          </a:p>
+          <a:p>
+            <a:pPr>
+              <a:spcAft>
+                <a:spcPts val="1260"/>
+              </a:spcAft>
+            </a:pPr>
+            <a:r>
+              <a:rPr sz="2800" b="1">
+                <a:solidFill>
+                  <a:srgbClr val="E8793A"/>
+                </a:solidFill>
+                <a:latin typeface="Nunito Sans"/>
+              </a:rPr>
+              <a:t>• </a:t>
+            </a:r>
+            <a:r>
+              <a:rPr sz="2800" b="1">
+                <a:solidFill>
+                  <a:srgbClr val="1F2A44"/>
+                </a:solidFill>
+                <a:latin typeface="Nunito Sans"/>
+              </a:rPr>
+              <a:t>Colaborar:</a:t>
+            </a:r>
+            <a:r>
+              <a:rPr sz="2800" b="0">
+                <a:solidFill>
+                  <a:srgbClr val="1F2A44"/>
+                </a:solidFill>
+                <a:latin typeface="Nunito Sans"/>
+              </a:rPr>
+              <a:t> buscamos juntos una salida buena para los dos.</a:t>
+            </a:r>
+          </a:p>
+        </p:txBody>
+      </p:sp>
     </p:spTree>
   </p:cSld>
   <p:clrMapOvr>
@@ -7607,7 +7518,7 @@
     <p:bg>
       <p:bgPr>
         <a:solidFill>
-          <a:srgbClr val="1F2A44"/>
+          <a:srgbClr val="FBF7EF"/>
         </a:solidFill>
         <a:effectLst/>
       </p:bgPr>
@@ -7627,8 +7538,8 @@
         </p:nvSpPr>
         <p:spPr>
           <a:xfrm>
-            <a:off x="640000" y="2300000"/>
-            <a:ext cx="10912000" cy="500000"/>
+            <a:off x="640000" y="380000"/>
+            <a:ext cx="10912000" cy="420000"/>
           </a:xfrm>
           <a:prstGeom prst="rect">
             <a:avLst/>
@@ -7643,17 +7554,17 @@
           <a:p>
             <a:pPr>
               <a:spcAft>
-                <a:spcPts val="810"/>
+                <a:spcPts val="630"/>
               </a:spcAft>
             </a:pPr>
             <a:r>
-              <a:rPr sz="1800" b="1">
-                <a:solidFill>
-                  <a:srgbClr val="F4B183"/>
-                </a:solidFill>
-                <a:latin typeface="Nunito Sans"/>
-              </a:rPr>
-              <a:t>BLOQUE 2</a:t>
+              <a:rPr sz="1400" b="1">
+                <a:solidFill>
+                  <a:srgbClr val="E8793A"/>
+                </a:solidFill>
+                <a:latin typeface="Nunito Sans"/>
+              </a:rPr>
+              <a:t>BLOQUE 1 · QUÉ ES UN CONFLICTO</a:t>
             </a:r>
           </a:p>
         </p:txBody>
@@ -7666,7 +7577,7 @@
         </p:nvSpPr>
         <p:spPr>
           <a:xfrm>
-            <a:off x="640000" y="2800000"/>
+            <a:off x="640000" y="760000"/>
             <a:ext cx="10912000" cy="800000"/>
           </a:xfrm>
           <a:prstGeom prst="rect">
@@ -7682,17 +7593,215 @@
           <a:p>
             <a:pPr>
               <a:spcAft>
-                <a:spcPts val="2160"/>
+                <a:spcPts val="1710"/>
               </a:spcAft>
             </a:pPr>
             <a:r>
-              <a:rPr sz="4800" b="1">
-                <a:solidFill>
-                  <a:srgbClr val="FBF7EF"/>
+              <a:rPr sz="3800" b="1">
+                <a:solidFill>
+                  <a:srgbClr val="1F2A44"/>
                 </a:solidFill>
                 <a:latin typeface="Fredoka"/>
               </a:rPr>
-              <a:t>Casos resueltos</a:t>
+              <a:t>Postura e interés</a:t>
+            </a:r>
+          </a:p>
+        </p:txBody>
+      </p:sp>
+      <p:sp>
+        <p:nvSpPr>
+          <p:cNvPr id="4" name="Rectangle 3"/>
+          <p:cNvSpPr/>
+          <p:nvPr/>
+        </p:nvSpPr>
+        <p:spPr>
+          <a:xfrm>
+            <a:off x="640000" y="1650000"/>
+            <a:ext cx="10912000" cy="1150000"/>
+          </a:xfrm>
+          <a:prstGeom prst="rect">
+            <a:avLst/>
+          </a:prstGeom>
+          <a:solidFill>
+            <a:srgbClr val="EAF0F7"/>
+          </a:solidFill>
+          <a:ln>
+            <a:noFill/>
+          </a:ln>
+        </p:spPr>
+        <p:style>
+          <a:lnRef idx="1">
+            <a:schemeClr val="accent1"/>
+          </a:lnRef>
+          <a:fillRef idx="3">
+            <a:schemeClr val="accent1"/>
+          </a:fillRef>
+          <a:effectRef idx="2">
+            <a:schemeClr val="accent1"/>
+          </a:effectRef>
+          <a:fontRef idx="minor">
+            <a:schemeClr val="lt1"/>
+          </a:fontRef>
+        </p:style>
+        <p:txBody>
+          <a:bodyPr rtlCol="0" anchor="ctr"/>
+          <a:lstStyle/>
+          <a:p>
+            <a:pPr algn="ctr"/>
+          </a:p>
+        </p:txBody>
+      </p:sp>
+      <p:sp>
+        <p:nvSpPr>
+          <p:cNvPr id="5" name="TextBox 4"/>
+          <p:cNvSpPr txBox="1"/>
+          <p:nvPr/>
+        </p:nvSpPr>
+        <p:spPr>
+          <a:xfrm>
+            <a:off x="840000" y="1730000"/>
+            <a:ext cx="10512000" cy="1000000"/>
+          </a:xfrm>
+          <a:prstGeom prst="rect">
+            <a:avLst/>
+          </a:prstGeom>
+          <a:noFill/>
+        </p:spPr>
+        <p:txBody>
+          <a:bodyPr wrap="square" anchor="ctr">
+            <a:spAutoFit/>
+          </a:bodyPr>
+          <a:lstStyle/>
+          <a:p>
+            <a:pPr>
+              <a:spcAft>
+                <a:spcPts val="1260"/>
+              </a:spcAft>
+            </a:pPr>
+            <a:r>
+              <a:rPr sz="2800" b="1">
+                <a:solidFill>
+                  <a:srgbClr val="1F2A44"/>
+                </a:solidFill>
+                <a:latin typeface="Nunito Sans"/>
+              </a:rPr>
+              <a:t>La postura es lo que pido. El interés es lo que necesito de verdad, la razón por la que lo pido.</a:t>
+            </a:r>
+          </a:p>
+        </p:txBody>
+      </p:sp>
+      <p:sp>
+        <p:nvSpPr>
+          <p:cNvPr id="6" name="TextBox 5"/>
+          <p:cNvSpPr txBox="1"/>
+          <p:nvPr/>
+        </p:nvSpPr>
+        <p:spPr>
+          <a:xfrm>
+            <a:off x="640000" y="3000000"/>
+            <a:ext cx="10912000" cy="3458000"/>
+          </a:xfrm>
+          <a:prstGeom prst="rect">
+            <a:avLst/>
+          </a:prstGeom>
+          <a:noFill/>
+        </p:spPr>
+        <p:txBody>
+          <a:bodyPr wrap="square">
+            <a:spAutoFit/>
+          </a:bodyPr>
+          <a:lstStyle/>
+          <a:p>
+            <a:pPr>
+              <a:spcAft>
+                <a:spcPts val="1260"/>
+              </a:spcAft>
+            </a:pPr>
+            <a:r>
+              <a:rPr sz="2800" b="1">
+                <a:solidFill>
+                  <a:srgbClr val="E8793A"/>
+                </a:solidFill>
+                <a:latin typeface="Nunito Sans"/>
+              </a:rPr>
+              <a:t>• </a:t>
+            </a:r>
+            <a:r>
+              <a:rPr sz="2800" b="0">
+                <a:solidFill>
+                  <a:srgbClr val="1F2A44"/>
+                </a:solidFill>
+                <a:latin typeface="Nunito Sans"/>
+              </a:rPr>
+              <a:t>Las </a:t>
+            </a:r>
+            <a:r>
+              <a:rPr sz="2800" b="1">
+                <a:solidFill>
+                  <a:srgbClr val="1F2A44"/>
+                </a:solidFill>
+                <a:latin typeface="Nunito Sans"/>
+              </a:rPr>
+              <a:t>posturas</a:t>
+            </a:r>
+            <a:r>
+              <a:rPr sz="2800" b="0">
+                <a:solidFill>
+                  <a:srgbClr val="1F2A44"/>
+                </a:solidFill>
+                <a:latin typeface="Nunito Sans"/>
+              </a:rPr>
+              <a:t> chocan más que los intereses</a:t>
+            </a:r>
+          </a:p>
+          <a:p>
+            <a:pPr>
+              <a:spcAft>
+                <a:spcPts val="1260"/>
+              </a:spcAft>
+            </a:pPr>
+            <a:r>
+              <a:rPr sz="2800" b="1">
+                <a:solidFill>
+                  <a:srgbClr val="E8793A"/>
+                </a:solidFill>
+                <a:latin typeface="Nunito Sans"/>
+              </a:rPr>
+              <a:t>• </a:t>
+            </a:r>
+            <a:r>
+              <a:rPr sz="2800" b="0">
+                <a:solidFill>
+                  <a:srgbClr val="1F2A44"/>
+                </a:solidFill>
+                <a:latin typeface="Nunito Sans"/>
+              </a:rPr>
+              <a:t>Pregunta clave: «¿Para qué lo quieres?»</a:t>
+            </a:r>
+          </a:p>
+          <a:p>
+            <a:pPr>
+              <a:spcAft>
+                <a:spcPts val="1260"/>
+              </a:spcAft>
+            </a:pPr>
+            <a:r>
+              <a:rPr sz="2800" b="1">
+                <a:solidFill>
+                  <a:srgbClr val="E8793A"/>
+                </a:solidFill>
+                <a:latin typeface="Nunito Sans"/>
+              </a:rPr>
+              <a:t>• </a:t>
+            </a:r>
+            <a:r>
+              <a:rPr sz="2800" b="0">
+                <a:solidFill>
+                  <a:srgbClr val="1F2A44"/>
+                </a:solidFill>
+                <a:latin typeface="Nunito Sans"/>
+              </a:rPr>
+              <a:t>Idea de Roger Fisher y William Ury (Harvard, 1981)</a:t>
             </a:r>
           </a:p>
         </p:txBody>
